--- a/MECH191_metallurgy/slideDecks/pptx/MECH191_Week1_Intro.pptx
+++ b/MECH191_metallurgy/slideDecks/pptx/MECH191_Week1_Intro.pptx
@@ -8303,7 +8303,7 @@
         </p:style>
         <p:txBody>
           <a:bodyPr wrap="none" lIns="0" tIns="0" rIns="0" bIns="0" anchor="t">
-            <a:spAutoFit/>
+            <a:noAutofit/>
           </a:bodyPr>
           <a:p>
             <a:pPr defTabSz="457200">
@@ -8320,7 +8320,7 @@
                 <a:uFillTx/>
                 <a:latin typeface="Calibri"/>
               </a:rPr>
-              <a:t>Specimen Schedule — What You'll Examine Each Week</a:t>
+              <a:t>Alloy Research Schedule — What You'll Research Each Week</a:t>
             </a:r>
             <a:endParaRPr lang="en-US" sz="2200" b="0" u="none" strike="noStrike">
               <a:solidFill>
@@ -8474,7 +8474,7 @@
         </p:style>
         <p:txBody>
           <a:bodyPr wrap="none" lIns="0" tIns="0" rIns="0" bIns="0" anchor="t">
-            <a:spAutoFit/>
+            <a:noAutofit/>
           </a:bodyPr>
           <a:p>
             <a:pPr defTabSz="457200">
@@ -8491,7 +8491,7 @@
                 <a:uFillTx/>
                 <a:latin typeface="Calibri"/>
               </a:rPr>
-              <a:t>Alloys Examined</a:t>
+              <a:t>Alloys Researched</a:t>
             </a:r>
             <a:endParaRPr lang="en-US" sz="1000" b="0" u="none" strike="noStrike">
               <a:solidFill>
@@ -10184,7 +10184,7 @@
         </p:style>
         <p:txBody>
           <a:bodyPr wrap="none" lIns="0" tIns="0" rIns="0" bIns="0" anchor="t">
-            <a:spAutoFit/>
+            <a:noAutofit/>
           </a:bodyPr>
           <a:p>
             <a:pPr defTabSz="457200">
@@ -10201,7 +10201,7 @@
                 <a:uFillTx/>
                 <a:latin typeface="Calibri"/>
               </a:rPr>
-              <a:t>Alloys Examined</a:t>
+              <a:t>Alloys Researched</a:t>
             </a:r>
             <a:endParaRPr lang="en-US" sz="1000" b="0" u="none" strike="noStrike">
               <a:solidFill>
@@ -11438,7 +11438,7 @@
         </p:style>
         <p:txBody>
           <a:bodyPr wrap="none" lIns="0" tIns="0" rIns="0" bIns="0" anchor="t">
-            <a:spAutoFit/>
+            <a:noAutofit/>
           </a:bodyPr>
           <a:p>
             <a:pPr defTabSz="457200">
@@ -11455,7 +11455,7 @@
                 <a:uFillTx/>
                 <a:latin typeface="Calibri"/>
               </a:rPr>
-              <a:t>Each week's metallography module draws from the shared 15-specimen kit. “Revisit” means an alloy you've already examined, now viewed through a new lens.</a:t>
+              <a:t>Each week's research module draws from the shared 15-alloy specimen set. “Revisit” means an alloy you've already researched, now viewed through a new lens.</a:t>
             </a:r>
             <a:endParaRPr lang="en-US" sz="1000" b="0" u="none" strike="noStrike">
               <a:solidFill>
@@ -16886,7 +16886,7 @@
         </p:style>
         <p:txBody>
           <a:bodyPr wrap="none" lIns="0" tIns="0" rIns="0" bIns="0" anchor="t">
-            <a:spAutoFit/>
+            <a:noAutofit/>
           </a:bodyPr>
           <a:p>
             <a:pPr defTabSz="457200">
@@ -16903,7 +16903,7 @@
                 <a:uFillTx/>
                 <a:latin typeface="Calibri"/>
               </a:rPr>
-              <a:t>Metallography Portfolio</a:t>
+              <a:t>Alloy Research Portfolio</a:t>
             </a:r>
             <a:endParaRPr lang="en-US" sz="1200" b="0" u="none" strike="noStrike">
               <a:solidFill>
@@ -18026,7 +18026,7 @@
         </p:style>
         <p:txBody>
           <a:bodyPr wrap="none" lIns="0" tIns="0" rIns="0" bIns="0" anchor="t">
-            <a:spAutoFit/>
+            <a:noAutofit/>
           </a:bodyPr>
           <a:p>
             <a:pPr defTabSz="457200">
@@ -18043,7 +18043,7 @@
                 <a:uFillTx/>
                 <a:latin typeface="Calibri"/>
               </a:rPr>
-              <a:t>The Metallography Portfolio (50 pts) is graded internally across all 15 weekly modules plus a holistic end-of-semester review — see the </a:t>
+              <a:t>The Alloy Research Portfolio (50 pts) is graded internally across all 15 weekly modules plus a holistic end-of-semester review — see the </a:t>
             </a:r>
             <a:endParaRPr lang="en-US" sz="1100" b="0" u="none" strike="noStrike">
               <a:solidFill>
@@ -18083,7 +18083,7 @@
         </p:style>
         <p:txBody>
           <a:bodyPr wrap="none" lIns="0" tIns="0" rIns="0" bIns="0" anchor="t">
-            <a:spAutoFit/>
+            <a:noAutofit/>
           </a:bodyPr>
           <a:p>
             <a:pPr defTabSz="457200">
@@ -18100,7 +18100,7 @@
                 <a:uFillTx/>
                 <a:latin typeface="Calibri"/>
               </a:rPr>
-              <a:t>Metallography Lab slide for details.</a:t>
+              <a:t>Alloy Research Portfolio slide for details.</a:t>
             </a:r>
             <a:endParaRPr lang="en-US" sz="1100" b="0" u="none" strike="noStrike">
               <a:solidFill>
@@ -24129,7 +24129,7 @@
         </p:style>
         <p:txBody>
           <a:bodyPr wrap="none" lIns="0" tIns="0" rIns="0" bIns="0" anchor="t">
-            <a:spAutoFit/>
+            <a:noAutofit/>
           </a:bodyPr>
           <a:p>
             <a:pPr defTabSz="457200">
@@ -24146,7 +24146,7 @@
                 <a:uFillTx/>
                 <a:latin typeface="Calibri"/>
               </a:rPr>
-              <a:t>The Metallography Lab</a:t>
+              <a:t>The Alloy Research Portfolio</a:t>
             </a:r>
             <a:endParaRPr lang="en-US" sz="2200" b="0" u="none" strike="noStrike">
               <a:solidFill>
@@ -24186,7 +24186,7 @@
         </p:style>
         <p:txBody>
           <a:bodyPr wrap="none" lIns="0" tIns="0" rIns="0" bIns="0" anchor="t">
-            <a:spAutoFit/>
+            <a:noAutofit/>
           </a:bodyPr>
           <a:p>
             <a:pPr defTabSz="457200">
@@ -24203,7 +24203,7 @@
                 <a:uFillTx/>
                 <a:latin typeface="Calibri"/>
               </a:rPr>
-              <a:t>Every instructional week, you'll complete one metallography module using the shared class specimen kit and the </a:t>
+              <a:t>Every instructional week, you'll research one or more alloys from the class specimen set using real, published </a:t>
             </a:r>
             <a:endParaRPr lang="en-US" sz="1300" b="0" u="none" strike="noStrike">
               <a:solidFill>
@@ -24243,7 +24243,7 @@
         </p:style>
         <p:txBody>
           <a:bodyPr wrap="none" lIns="0" tIns="0" rIns="0" bIns="0" anchor="t">
-            <a:spAutoFit/>
+            <a:noAutofit/>
           </a:bodyPr>
           <a:p>
             <a:pPr defTabSz="457200">
@@ -24260,7 +24260,7 @@
                 <a:uFillTx/>
                 <a:latin typeface="Calibri"/>
               </a:rPr>
-              <a:t>EXAMET-5-R-600-HD microscope — examine a specimen, complete an observation table, sketch or photograph the </a:t>
+              <a:t>composition, properties, and applications data — no microscope work or lab session is required to </a:t>
             </a:r>
             <a:endParaRPr lang="en-US" sz="1300" b="0" u="none" strike="noStrike">
               <a:solidFill>
@@ -24300,7 +24300,7 @@
         </p:style>
         <p:txBody>
           <a:bodyPr wrap="none" lIns="0" tIns="0" rIns="0" bIns="0" anchor="t">
-            <a:spAutoFit/>
+            <a:noAutofit/>
           </a:bodyPr>
           <a:p>
             <a:pPr defTabSz="457200">
@@ -24317,7 +24317,7 @@
                 <a:uFillTx/>
                 <a:latin typeface="Calibri"/>
               </a:rPr>
-              <a:t>key feature, and answer short-answer questions.</a:t>
+              <a:t>complete it. Record your sources as you go.</a:t>
             </a:r>
             <a:endParaRPr lang="en-US" sz="1300" b="0" u="none" strike="noStrike">
               <a:solidFill>
@@ -24357,7 +24357,7 @@
         </p:style>
         <p:txBody>
           <a:bodyPr wrap="none" lIns="0" tIns="0" rIns="0" bIns="0" anchor="t">
-            <a:spAutoFit/>
+            <a:noAutofit/>
           </a:bodyPr>
           <a:p>
             <a:pPr defTabSz="457200">
@@ -24374,7 +24374,7 @@
                 <a:uFillTx/>
                 <a:latin typeface="Calibri"/>
               </a:rPr>
-              <a:t>Check Out</a:t>
+              <a:t>Research</a:t>
             </a:r>
             <a:endParaRPr lang="en-US" sz="1400" b="0" u="none" strike="noStrike">
               <a:solidFill>
@@ -24414,7 +24414,7 @@
         </p:style>
         <p:txBody>
           <a:bodyPr wrap="none" lIns="0" tIns="0" rIns="0" bIns="0" anchor="t">
-            <a:spAutoFit/>
+            <a:noAutofit/>
           </a:bodyPr>
           <a:p>
             <a:pPr defTabSz="457200">
@@ -24431,7 +24431,7 @@
                 <a:uFillTx/>
                 <a:latin typeface="Calibri"/>
               </a:rPr>
-              <a:t>See the instructor after class and </a:t>
+              <a:t>Look up the assigned alloy(s) using</a:t>
             </a:r>
             <a:endParaRPr lang="en-US" sz="1200" b="0" u="none" strike="noStrike">
               <a:solidFill>
@@ -24471,7 +24471,7 @@
         </p:style>
         <p:txBody>
           <a:bodyPr wrap="none" lIns="0" tIns="0" rIns="0" bIns="0" anchor="t">
-            <a:spAutoFit/>
+            <a:noAutofit/>
           </a:bodyPr>
           <a:p>
             <a:pPr defTabSz="457200">
@@ -24488,7 +24488,7 @@
                 <a:uFillTx/>
                 <a:latin typeface="Calibri"/>
               </a:rPr>
-              <a:t>sign out the specimen tray.</a:t>
+              <a:t>credible published sources.</a:t>
             </a:r>
             <a:endParaRPr lang="en-US" sz="1200" b="0" u="none" strike="noStrike">
               <a:solidFill>
@@ -24528,7 +24528,7 @@
         </p:style>
         <p:txBody>
           <a:bodyPr wrap="none" lIns="0" tIns="0" rIns="0" bIns="0" anchor="t">
-            <a:spAutoFit/>
+            <a:noAutofit/>
           </a:bodyPr>
           <a:p>
             <a:pPr defTabSz="457200">
@@ -24545,7 +24545,7 @@
                 <a:uFillTx/>
                 <a:latin typeface="Calibri"/>
               </a:rPr>
-              <a:t>Examine</a:t>
+              <a:t>Document</a:t>
             </a:r>
             <a:endParaRPr lang="en-US" sz="1400" b="0" u="none" strike="noStrike">
               <a:solidFill>
@@ -24585,7 +24585,7 @@
         </p:style>
         <p:txBody>
           <a:bodyPr wrap="none" lIns="0" tIns="0" rIns="0" bIns="0" anchor="t">
-            <a:spAutoFit/>
+            <a:noAutofit/>
           </a:bodyPr>
           <a:p>
             <a:pPr defTabSz="457200">
@@ -24602,7 +24602,7 @@
                 <a:uFillTx/>
                 <a:latin typeface="Calibri"/>
               </a:rPr>
-              <a:t>Work through the module's </a:t>
+              <a:t>Record composition, properties,</a:t>
             </a:r>
             <a:endParaRPr lang="en-US" sz="1200" b="0" u="none" strike="noStrike">
               <a:solidFill>
@@ -24642,7 +24642,7 @@
         </p:style>
         <p:txBody>
           <a:bodyPr wrap="none" lIns="0" tIns="0" rIns="0" bIns="0" anchor="t">
-            <a:spAutoFit/>
+            <a:noAutofit/>
           </a:bodyPr>
           <a:p>
             <a:pPr defTabSz="457200">
@@ -24659,7 +24659,7 @@
                 <a:uFillTx/>
                 <a:latin typeface="Calibri"/>
               </a:rPr>
-              <a:t>magnifications on the EXAMET-5, </a:t>
+              <a:t>processing, and applications data</a:t>
             </a:r>
             <a:endParaRPr lang="en-US" sz="1200" b="0" u="none" strike="noStrike">
               <a:solidFill>
@@ -24699,7 +24699,7 @@
         </p:style>
         <p:txBody>
           <a:bodyPr wrap="none" lIns="0" tIns="0" rIns="0" bIns="0" anchor="t">
-            <a:spAutoFit/>
+            <a:noAutofit/>
           </a:bodyPr>
           <a:p>
             <a:pPr defTabSz="457200">
@@ -24716,7 +24716,7 @@
                 <a:uFillTx/>
                 <a:latin typeface="Calibri"/>
               </a:rPr>
-              <a:t>following the setup steps.</a:t>
+              <a:t>with a proper source citation.</a:t>
             </a:r>
             <a:endParaRPr lang="en-US" sz="1200" b="0" u="none" strike="noStrike">
               <a:solidFill>
@@ -24756,7 +24756,7 @@
         </p:style>
         <p:txBody>
           <a:bodyPr wrap="none" lIns="0" tIns="0" rIns="0" bIns="0" anchor="t">
-            <a:spAutoFit/>
+            <a:noAutofit/>
           </a:bodyPr>
           <a:p>
             <a:pPr defTabSz="457200">
@@ -24813,7 +24813,7 @@
         </p:style>
         <p:txBody>
           <a:bodyPr wrap="none" lIns="0" tIns="0" rIns="0" bIns="0" anchor="t">
-            <a:spAutoFit/>
+            <a:noAutofit/>
           </a:bodyPr>
           <a:p>
             <a:pPr defTabSz="457200">
@@ -24830,7 +24830,7 @@
                 <a:uFillTx/>
                 <a:latin typeface="Calibri"/>
               </a:rPr>
-              <a:t>Return the kit before leaving class. </a:t>
+              <a:t>Answer that week's short-answer and</a:t>
             </a:r>
             <a:endParaRPr lang="en-US" sz="1200" b="0" u="none" strike="noStrike">
               <a:solidFill>
@@ -24870,7 +24870,7 @@
         </p:style>
         <p:txBody>
           <a:bodyPr wrap="none" lIns="0" tIns="0" rIns="0" bIns="0" anchor="t">
-            <a:spAutoFit/>
+            <a:noAutofit/>
           </a:bodyPr>
           <a:p>
             <a:pPr defTabSz="457200">
@@ -24887,7 +24887,7 @@
                 <a:uFillTx/>
                 <a:latin typeface="Calibri"/>
               </a:rPr>
-              <a:t>All 15 modules are compiled into </a:t>
+              <a:t>critical-thinking questions. All 15</a:t>
             </a:r>
             <a:endParaRPr lang="en-US" sz="1200" b="0" u="none" strike="noStrike">
               <a:solidFill>
@@ -24927,7 +24927,7 @@
         </p:style>
         <p:txBody>
           <a:bodyPr wrap="none" lIns="0" tIns="0" rIns="0" bIns="0" anchor="t">
-            <a:spAutoFit/>
+            <a:noAutofit/>
           </a:bodyPr>
           <a:p>
             <a:pPr defTabSz="457200">
@@ -24944,7 +24944,7 @@
                 <a:uFillTx/>
                 <a:latin typeface="Calibri"/>
               </a:rPr>
-              <a:t>one portfolio, due at the end of </a:t>
+              <a:t>modules compile into one portfolio,</a:t>
             </a:r>
             <a:endParaRPr lang="en-US" sz="1200" b="0" u="none" strike="noStrike">
               <a:solidFill>
@@ -24984,7 +24984,7 @@
         </p:style>
         <p:txBody>
           <a:bodyPr wrap="none" lIns="0" tIns="0" rIns="0" bIns="0" anchor="t">
-            <a:spAutoFit/>
+            <a:noAutofit/>
           </a:bodyPr>
           <a:p>
             <a:pPr defTabSz="457200">
@@ -25001,7 +25001,7 @@
                 <a:uFillTx/>
                 <a:latin typeface="Calibri"/>
               </a:rPr>
-              <a:t>the semester.</a:t>
+              <a:t>due at the end of the semester.</a:t>
             </a:r>
             <a:endParaRPr lang="en-US" sz="1200" b="0" u="none" strike="noStrike">
               <a:solidFill>
